--- a/base_ppt/base_output/1.2_提示词工程.pptx
+++ b/base_ppt/base_output/1.2_提示词工程.pptx
@@ -16726,7 +16726,7 @@
               <a:rPr lang="zh-CN" sz="2000" dirty="0">
                 <a:latin typeface="Arial" panose="020B0604020202020204" pitchFamily="34" charset="0"/>
               </a:rPr>
-              <a:t>提示词即行为设计</a:t>
+              <a:t>提示词是智能体的行为说明书；</a:t>
             </a:r>
             <a:endParaRPr lang="zh-CN" sz="2000" dirty="0">
               <a:latin typeface="Arial" panose="020B0604020202020204" pitchFamily="34" charset="0"/>
@@ -16765,12 +16765,46 @@
             <a:r>
               <a:rPr lang="zh-CN" sz="2000" dirty="0">
                 <a:latin typeface="Arial" panose="020B0604020202020204" pitchFamily="34" charset="0"/>
+                <a:cs typeface="Arial" panose="020B0604020202020204" pitchFamily="34" charset="0"/>
                 <a:sym typeface="+mn-ea"/>
               </a:rPr>
-              <a:t>系统化认知模型行为塑造</a:t>
+              <a:t>从</a:t>
             </a:r>
-            <a:endParaRPr lang="zh-CN" sz="2000" dirty="0">
+            <a:r>
+              <a:rPr lang="en-US" altLang="zh-CN" sz="2000" dirty="0">
+                <a:latin typeface="Arial" panose="020B0604020202020204" pitchFamily="34" charset="0"/>
+                <a:cs typeface="Arial" panose="020B0604020202020204" pitchFamily="34" charset="0"/>
+                <a:sym typeface="+mn-ea"/>
+              </a:rPr>
+              <a:t>LLM</a:t>
+            </a:r>
+            <a:r>
+              <a:rPr lang="zh-CN" altLang="en-US" sz="2000" dirty="0">
+                <a:latin typeface="Arial" panose="020B0604020202020204" pitchFamily="34" charset="0"/>
+                <a:cs typeface="Arial" panose="020B0604020202020204" pitchFamily="34" charset="0"/>
+                <a:sym typeface="+mn-ea"/>
+              </a:rPr>
+              <a:t>到</a:t>
+            </a:r>
+            <a:r>
+              <a:rPr lang="en-US" altLang="zh-CN" sz="2000" dirty="0">
+                <a:latin typeface="Arial" panose="020B0604020202020204" pitchFamily="34" charset="0"/>
+                <a:cs typeface="Arial" panose="020B0604020202020204" pitchFamily="34" charset="0"/>
+                <a:sym typeface="+mn-ea"/>
+              </a:rPr>
+              <a:t>Agent</a:t>
+            </a:r>
+            <a:r>
+              <a:rPr lang="zh-CN" altLang="en-US" sz="2000" dirty="0">
+                <a:latin typeface="Arial" panose="020B0604020202020204" pitchFamily="34" charset="0"/>
+                <a:cs typeface="Arial" panose="020B0604020202020204" pitchFamily="34" charset="0"/>
+                <a:sym typeface="+mn-ea"/>
+              </a:rPr>
+              <a:t>的决策逻辑认知；</a:t>
+            </a:r>
+            <a:endParaRPr lang="zh-CN" altLang="en-US" sz="2000" dirty="0">
               <a:latin typeface="Arial" panose="020B0604020202020204" pitchFamily="34" charset="0"/>
+              <a:cs typeface="Arial" panose="020B0604020202020204" pitchFamily="34" charset="0"/>
               <a:sym typeface="+mn-ea"/>
             </a:endParaRPr>
           </a:p>
@@ -16808,7 +16842,7 @@
               <a:rPr lang="zh-CN" sz="2000" dirty="0">
                 <a:latin typeface="Arial" panose="020B0604020202020204" pitchFamily="34" charset="0"/>
               </a:rPr>
-              <a:t>确定性、逻辑性、效率三目标</a:t>
+              <a:t>优质提示词兼顾确定性、逻辑性、效率；</a:t>
             </a:r>
             <a:endParaRPr lang="zh-CN" sz="2000" dirty="0">
               <a:latin typeface="Arial" panose="020B0604020202020204" pitchFamily="34" charset="0"/>
@@ -16848,7 +16882,7 @@
               <a:rPr lang="zh-CN" sz="2000" dirty="0">
                 <a:latin typeface="Arial" panose="020B0604020202020204" pitchFamily="34" charset="0"/>
               </a:rPr>
-              <a:t>结构化与版本管理</a:t>
+              <a:t>结构化提示词与版本管理确保可维护性。</a:t>
             </a:r>
             <a:endParaRPr lang="zh-CN" sz="2000" dirty="0">
               <a:latin typeface="Arial" panose="020B0604020202020204" pitchFamily="34" charset="0"/>
@@ -16889,7 +16923,7 @@
                 <a:latin typeface="Arial" panose="020B0604020202020204" pitchFamily="34" charset="0"/>
                 <a:sym typeface="+mn-ea"/>
               </a:rPr>
-              <a:t>概率生成机制理解</a:t>
+              <a:t>提示词如何塑造模型行为而非简单提问；</a:t>
             </a:r>
             <a:endParaRPr lang="zh-CN" sz="2000" dirty="0">
               <a:latin typeface="Arial" panose="020B0604020202020204" pitchFamily="34" charset="0"/>
@@ -16931,7 +16965,7 @@
                 <a:latin typeface="Arial" panose="020B0604020202020204" pitchFamily="34" charset="0"/>
                 <a:sym typeface="+mn-ea"/>
               </a:rPr>
-              <a:t>清晰上下文与约束收紧</a:t>
+              <a:t>从概率生成到可控输出的系统化设计。</a:t>
             </a:r>
             <a:endParaRPr lang="zh-CN" sz="2000" dirty="0">
               <a:latin typeface="Arial" panose="020B0604020202020204" pitchFamily="34" charset="0"/>
@@ -18853,45 +18887,9 @@
                 <a:cs typeface="微软雅黑" panose="020B0503020204020204" pitchFamily="34" charset="-122"/>
                 <a:sym typeface="+mn-ea"/>
               </a:rPr>
-              <a:t>通过</a:t>
+              <a:t>通过添加示例让模型模仿输出格式，提升一致性；最不能缺少的三项约束：明确角色与业务范围、定义处理流程步骤、设置拒答与输出格式规则。</a:t>
             </a:r>
-            <a:r>
-              <a:rPr lang="en-US" altLang="zh-CN" sz="2000" dirty="0">
-                <a:latin typeface="微软雅黑" panose="020B0503020204020204" pitchFamily="34" charset="-122"/>
-                <a:ea typeface="微软雅黑" panose="020B0503020204020204" pitchFamily="34" charset="-122"/>
-                <a:cs typeface="微软雅黑" panose="020B0503020204020204" pitchFamily="34" charset="-122"/>
-                <a:sym typeface="+mn-ea"/>
-              </a:rPr>
-              <a:t>few-shot</a:t>
-            </a:r>
-            <a:r>
-              <a:rPr lang="zh-CN" altLang="en-US" sz="2000" dirty="0">
-                <a:latin typeface="微软雅黑" panose="020B0503020204020204" pitchFamily="34" charset="-122"/>
-                <a:ea typeface="微软雅黑" panose="020B0503020204020204" pitchFamily="34" charset="-122"/>
-                <a:cs typeface="微软雅黑" panose="020B0503020204020204" pitchFamily="34" charset="-122"/>
-                <a:sym typeface="+mn-ea"/>
-              </a:rPr>
-              <a:t>示例为模型提供输入输出模板，帮助模型理解每个维度的具体要求，提升输出稳定性。针对企业客服</a:t>
-            </a:r>
-            <a:r>
-              <a:rPr lang="en-US" altLang="zh-CN" sz="2000" dirty="0">
-                <a:latin typeface="微软雅黑" panose="020B0503020204020204" pitchFamily="34" charset="-122"/>
-                <a:ea typeface="微软雅黑" panose="020B0503020204020204" pitchFamily="34" charset="-122"/>
-                <a:cs typeface="微软雅黑" panose="020B0503020204020204" pitchFamily="34" charset="-122"/>
-                <a:sym typeface="+mn-ea"/>
-              </a:rPr>
-              <a:t>Agent</a:t>
-            </a:r>
-            <a:r>
-              <a:rPr lang="zh-CN" altLang="en-US" sz="2000" dirty="0">
-                <a:latin typeface="微软雅黑" panose="020B0503020204020204" pitchFamily="34" charset="-122"/>
-                <a:ea typeface="微软雅黑" panose="020B0503020204020204" pitchFamily="34" charset="-122"/>
-                <a:cs typeface="微软雅黑" panose="020B0503020204020204" pitchFamily="34" charset="-122"/>
-                <a:sym typeface="+mn-ea"/>
-              </a:rPr>
-              <a:t>，应明确：角色身份界定、业务范围限定、输出格式规范这三项核心约束。</a:t>
-            </a:r>
-            <a:endParaRPr lang="zh-CN" altLang="en-US" sz="2000" dirty="0">
+            <a:endParaRPr lang="zh-CN" sz="2000" dirty="0">
               <a:latin typeface="微软雅黑" panose="020B0503020204020204" pitchFamily="34" charset="-122"/>
               <a:ea typeface="微软雅黑" panose="020B0503020204020204" pitchFamily="34" charset="-122"/>
               <a:cs typeface="微软雅黑" panose="020B0503020204020204" pitchFamily="34" charset="-122"/>
@@ -20048,8 +20046,8 @@
         </p:nvSpPr>
         <p:spPr>
           <a:xfrm>
-            <a:off x="389890" y="1929130"/>
-            <a:ext cx="6534785" cy="3415665"/>
+            <a:off x="389890" y="1715770"/>
+            <a:ext cx="6534785" cy="3629025"/>
           </a:xfrm>
           <a:prstGeom prst="rect">
             <a:avLst/>
@@ -20073,7 +20071,7 @@
                 <a:ea typeface="微软雅黑" panose="020B0503020204020204" pitchFamily="34" charset="-122"/>
                 <a:sym typeface="+mn-ea"/>
               </a:rPr>
-              <a:t>某物流分拣中心引入新系统，要求从固定流程操作转变为智能决策：系统需自动判断条码污损包裹的清洁处理、易碎品的缓降滑道分流，并根据实时车流调整分拣优先级，实现从传统自动化向智能化自动化的升级。</a:t>
+              <a:t>某物流分拣中心每天处理上万件包裹，现有系统按固定流程操作。经理想引入新系统，让系统自己判断处理条码污损、易碎品等异常情况，并能根据实时车流调整分拣优先级。</a:t>
             </a:r>
             <a:endParaRPr lang="zh-CN" altLang="zh-CN" dirty="0">
               <a:latin typeface="微软雅黑" panose="020B0503020204020204" pitchFamily="34" charset="-122"/>
@@ -20144,7 +20142,7 @@
                 <a:ea typeface="微软雅黑" panose="020B0503020204020204" pitchFamily="34" charset="-122"/>
                 <a:cs typeface="微软雅黑" panose="020B0503020204020204" pitchFamily="34" charset="-122"/>
               </a:rPr>
-              <a:t>传统自动化与智能化自动化的核心区别是什么</a:t>
+              <a:t>同样是自动化，工作流和智能体有什么区别？</a:t>
             </a:r>
             <a:r>
               <a:rPr lang="en-US" altLang="zh-CN" sz="2000" dirty="0">
@@ -20161,7 +20159,7 @@
                 <a:ea typeface="微软雅黑" panose="020B0503020204020204" pitchFamily="34" charset="-122"/>
                 <a:cs typeface="微软雅黑" panose="020B0503020204020204" pitchFamily="34" charset="-122"/>
               </a:rPr>
-              <a:t>新系统要稳定运行需要具备哪些关键功能</a:t>
+              <a:t>新系统需要具备什么功能才能在企业中稳定工作？</a:t>
             </a:r>
             <a:r>
               <a:rPr lang="en-US" altLang="zh-CN" sz="2000" dirty="0">
@@ -20178,7 +20176,7 @@
                 <a:ea typeface="微软雅黑" panose="020B0503020204020204" pitchFamily="34" charset="-122"/>
                 <a:cs typeface="微软雅黑" panose="020B0503020204020204" pitchFamily="34" charset="-122"/>
               </a:rPr>
-              <a:t>用自然语言给系统下指令需要包含哪些要素</a:t>
+              <a:t>如何用自己的话对系统下指令来实现经理的想法？</a:t>
             </a:r>
             <a:endParaRPr lang="zh-CN" altLang="en-US" sz="2000" dirty="0">
               <a:latin typeface="微软雅黑" panose="020B0503020204020204" pitchFamily="34" charset="-122"/>
@@ -22653,7 +22651,7 @@
                 <a:ea typeface="微软雅黑" panose="020B0503020204020204" pitchFamily="34" charset="-122"/>
                 <a:cs typeface="微软雅黑" panose="020B0503020204020204" pitchFamily="34" charset="-122"/>
               </a:rPr>
-              <a:t>"</a:t>
+              <a:t>“</a:t>
             </a:r>
             <a:r>
               <a:rPr lang="zh-CN" altLang="en-US" dirty="0" smtClean="0">
@@ -22669,7 +22667,7 @@
                 <a:ea typeface="微软雅黑" panose="020B0503020204020204" pitchFamily="34" charset="-122"/>
                 <a:cs typeface="微软雅黑" panose="020B0503020204020204" pitchFamily="34" charset="-122"/>
               </a:rPr>
-              <a:t>"</a:t>
+              <a:t>”</a:t>
             </a:r>
             <a:r>
               <a:rPr lang="zh-CN" altLang="en-US" dirty="0" smtClean="0">
@@ -22990,7 +22988,7 @@
                 <a:cs typeface="微软雅黑" panose="020B0503020204020204" pitchFamily="34" charset="-122"/>
                 <a:sym typeface="+mn-ea"/>
               </a:rPr>
-              <a:t>能从智能体系统设计视角理解提示词的价值</a:t>
+              <a:t>理解提示词的价值，建立行为设计意识</a:t>
             </a:r>
             <a:endParaRPr lang="zh-CN" dirty="0">
               <a:latin typeface="微软雅黑" panose="020B0503020204020204" pitchFamily="34" charset="-122"/>
@@ -23036,7 +23034,7 @@
                 <a:cs typeface="微软雅黑" panose="020B0503020204020204" pitchFamily="34" charset="-122"/>
                 <a:sym typeface="+mn-ea"/>
               </a:rPr>
-              <a:t>能围绕确定性、逻辑性、效率三个维度分析</a:t>
+              <a:t>能围绕确定性、逻辑性、效率三个维度分析一个提示词是否优质；</a:t>
             </a:r>
             <a:endParaRPr lang="zh-CN" dirty="0">
               <a:latin typeface="微软雅黑" panose="020B0503020204020204" pitchFamily="34" charset="-122"/>
@@ -23100,7 +23098,7 @@
                 <a:cs typeface="微软雅黑" panose="020B0503020204020204" pitchFamily="34" charset="-122"/>
                 <a:sym typeface="+mn-ea"/>
               </a:rPr>
-              <a:t>工作流开展提示词测试</a:t>
+              <a:t>工作流开展提示词测试、记录和迭代优化；</a:t>
             </a:r>
             <a:endParaRPr lang="zh-CN" altLang="en-US" dirty="0">
               <a:latin typeface="微软雅黑" panose="020B0503020204020204" pitchFamily="34" charset="-122"/>
@@ -23146,53 +23144,7 @@
                 <a:cs typeface="微软雅黑" panose="020B0503020204020204" pitchFamily="34" charset="-122"/>
                 <a:sym typeface="+mn-ea"/>
               </a:rPr>
-              <a:t>能根据具体场景判断如何构建提示词信息</a:t>
-            </a:r>
-            <a:endParaRPr lang="zh-CN" dirty="0">
-              <a:latin typeface="微软雅黑" panose="020B0503020204020204" pitchFamily="34" charset="-122"/>
-              <a:ea typeface="微软雅黑" panose="020B0503020204020204" pitchFamily="34" charset="-122"/>
-              <a:cs typeface="微软雅黑" panose="020B0503020204020204" pitchFamily="34" charset="-122"/>
-              <a:sym typeface="+mn-ea"/>
-            </a:endParaRPr>
-          </a:p>
-        </p:txBody>
-      </p:sp>
-      <p:sp>
-        <p:nvSpPr>
-          <p:cNvPr id="17" name="文本框 16"/>
-          <p:cNvSpPr txBox="1"/>
-          <p:nvPr/>
-        </p:nvSpPr>
-        <p:spPr>
-          <a:xfrm>
-            <a:off x="3006000" y="5439600"/>
-            <a:ext cx="8279765" cy="468630"/>
-          </a:xfrm>
-          <a:prstGeom prst="rect">
-            <a:avLst/>
-          </a:prstGeom>
-          <a:noFill/>
-        </p:spPr>
-        <p:txBody>
-          <a:bodyPr wrap="square" rtlCol="0">
-            <a:noAutofit/>
-          </a:bodyPr>
-          <a:p>
-            <a:pPr marL="800100" lvl="1" indent="-342900" algn="l" fontAlgn="auto">
-              <a:lnSpc>
-                <a:spcPct val="150000"/>
-              </a:lnSpc>
-              <a:buFont typeface="Wingdings" panose="05000000000000000000" pitchFamily="2" charset="2"/>
-              <a:buChar char="l"/>
-            </a:pPr>
-            <a:r>
-              <a:rPr lang="zh-CN" dirty="0">
-                <a:latin typeface="微软雅黑" panose="020B0503020204020204" pitchFamily="34" charset="-122"/>
-                <a:ea typeface="微软雅黑" panose="020B0503020204020204" pitchFamily="34" charset="-122"/>
-                <a:cs typeface="微软雅黑" panose="020B0503020204020204" pitchFamily="34" charset="-122"/>
-                <a:sym typeface="+mn-ea"/>
-              </a:rPr>
-              <a:t>理解提示词如何影响智能体的决策过程与输出稳定性</a:t>
+              <a:t>能根据场景构建提示词，约束智能体输出</a:t>
             </a:r>
             <a:endParaRPr lang="zh-CN" dirty="0">
               <a:latin typeface="微软雅黑" panose="020B0503020204020204" pitchFamily="34" charset="-122"/>
@@ -26862,7 +26814,7 @@
                 <a:cs typeface="Times New Roman" panose="02020603050405020304" charset="0"/>
                 <a:sym typeface="+mn-ea"/>
               </a:rPr>
-              <a:t>掌握提示词工程的基本目标、基本原理和基本工作环境</a:t>
+              <a:t>能围绕确定性、逻辑性、效率三个维度分析一个提示词是否优质；</a:t>
             </a:r>
             <a:endParaRPr lang="zh-CN" dirty="0" smtClean="0">
               <a:latin typeface="Arial" panose="020B0604020202020204" pitchFamily="34" charset="0"/>
@@ -26906,7 +26858,7 @@
                 <a:cs typeface="Times New Roman" panose="02020603050405020304" charset="0"/>
                 <a:sym typeface="+mn-ea"/>
               </a:rPr>
-              <a:t>理解提示词如何影响智能体的决策过程与输出稳定性</a:t>
+              <a:t>从系统设计视角理解提示词价值，建立行为设计意识</a:t>
             </a:r>
             <a:endParaRPr lang="zh-CN" dirty="0" smtClean="0">
               <a:latin typeface="Arial" panose="020B0604020202020204" pitchFamily="34" charset="0"/>
@@ -26947,14 +26899,30 @@
             <a:r>
               <a:rPr lang="zh-CN" dirty="0" smtClean="0">
                 <a:latin typeface="Arial" panose="020B0604020202020204" pitchFamily="34" charset="0"/>
-                <a:cs typeface="Times New Roman" panose="02020603050405020304" charset="0"/>
+                <a:cs typeface="Arial" panose="020B0604020202020204" pitchFamily="34" charset="0"/>
                 <a:sym typeface="+mn-ea"/>
               </a:rPr>
-              <a:t>掌握提示词工程的基本目标、基本原理和基本工作环境</a:t>
+              <a:t>能使用</a:t>
             </a:r>
-            <a:endParaRPr lang="zh-CN" dirty="0" smtClean="0">
+            <a:r>
+              <a:rPr lang="en-US" altLang="zh-CN" dirty="0" smtClean="0">
+                <a:latin typeface="Arial" panose="020B0604020202020204" pitchFamily="34" charset="0"/>
+                <a:cs typeface="Arial" panose="020B0604020202020204" pitchFamily="34" charset="0"/>
+                <a:sym typeface="+mn-ea"/>
+              </a:rPr>
+              <a:t>RAGFlow</a:t>
+            </a:r>
+            <a:r>
+              <a:rPr lang="zh-CN" altLang="en-US" dirty="0" smtClean="0">
+                <a:latin typeface="Arial" panose="020B0604020202020204" pitchFamily="34" charset="0"/>
+                <a:cs typeface="Arial" panose="020B0604020202020204" pitchFamily="34" charset="0"/>
+                <a:sym typeface="+mn-ea"/>
+              </a:rPr>
+              <a:t>工作流开展提示词测试、记录和迭代优化；</a:t>
+            </a:r>
+            <a:endParaRPr lang="zh-CN" altLang="en-US" dirty="0" smtClean="0">
               <a:latin typeface="Arial" panose="020B0604020202020204" pitchFamily="34" charset="0"/>
-              <a:cs typeface="Times New Roman" panose="02020603050405020304" charset="0"/>
+              <a:cs typeface="Arial" panose="020B0604020202020204" pitchFamily="34" charset="0"/>
               <a:sym typeface="+mn-ea"/>
             </a:endParaRPr>
           </a:p>
@@ -26991,46 +26959,14 @@
             <a:r>
               <a:rPr lang="zh-CN" dirty="0" smtClean="0">
                 <a:latin typeface="Arial" panose="020B0604020202020204" pitchFamily="34" charset="0"/>
-                <a:cs typeface="Arial" panose="020B0604020202020204" pitchFamily="34" charset="0"/>
+                <a:cs typeface="Times New Roman" panose="02020603050405020304" charset="0"/>
                 <a:sym typeface="+mn-ea"/>
               </a:rPr>
-              <a:t>建立</a:t>
+              <a:t>能根据场景构建提示词，约束智能体输出符合需求的内容</a:t>
             </a:r>
-            <a:r>
-              <a:rPr lang="en-US" altLang="zh-CN" dirty="0" smtClean="0">
-                <a:latin typeface="Arial" panose="020B0604020202020204" pitchFamily="34" charset="0"/>
-                <a:cs typeface="Arial" panose="020B0604020202020204" pitchFamily="34" charset="0"/>
-                <a:sym typeface="+mn-ea"/>
-              </a:rPr>
-              <a:t>"</a:t>
-            </a:r>
-            <a:r>
-              <a:rPr lang="zh-CN" altLang="en-US" dirty="0" smtClean="0">
-                <a:latin typeface="Arial" panose="020B0604020202020204" pitchFamily="34" charset="0"/>
-                <a:cs typeface="Arial" panose="020B0604020202020204" pitchFamily="34" charset="0"/>
-                <a:sym typeface="+mn-ea"/>
-              </a:rPr>
-              <a:t>提示词即行为设计</a:t>
-            </a:r>
-            <a:r>
-              <a:rPr lang="en-US" altLang="zh-CN" dirty="0" smtClean="0">
-                <a:latin typeface="Arial" panose="020B0604020202020204" pitchFamily="34" charset="0"/>
-                <a:cs typeface="Arial" panose="020B0604020202020204" pitchFamily="34" charset="0"/>
-                <a:sym typeface="+mn-ea"/>
-              </a:rPr>
-              <a:t>"</a:t>
-            </a:r>
-            <a:r>
-              <a:rPr lang="zh-CN" altLang="en-US" dirty="0" smtClean="0">
-                <a:latin typeface="Arial" panose="020B0604020202020204" pitchFamily="34" charset="0"/>
-                <a:cs typeface="Arial" panose="020B0604020202020204" pitchFamily="34" charset="0"/>
-                <a:sym typeface="+mn-ea"/>
-              </a:rPr>
-              <a:t>的意识</a:t>
-            </a:r>
-            <a:endParaRPr lang="zh-CN" altLang="en-US" dirty="0" smtClean="0">
+            <a:endParaRPr lang="zh-CN" dirty="0" smtClean="0">
               <a:latin typeface="Arial" panose="020B0604020202020204" pitchFamily="34" charset="0"/>
-              <a:cs typeface="Arial" panose="020B0604020202020204" pitchFamily="34" charset="0"/>
+              <a:cs typeface="Times New Roman" panose="02020603050405020304" charset="0"/>
               <a:sym typeface="+mn-ea"/>
             </a:endParaRPr>
           </a:p>
@@ -27070,7 +27006,7 @@
                 <a:cs typeface="Times New Roman" panose="02020603050405020304" charset="0"/>
                 <a:sym typeface="+mn-ea"/>
               </a:rPr>
-              <a:t>重点：理解提示词如何影响智能体的决策过程与输出稳定性</a:t>
+              <a:t>重点：理解提示词如何影响智能体的决策过程与输出稳定性；</a:t>
             </a:r>
             <a:endParaRPr lang="zh-CN" altLang="en-US" dirty="0" smtClean="0">
               <a:latin typeface="Arial" panose="020B0604020202020204" pitchFamily="34" charset="0"/>
@@ -27111,78 +27047,14 @@
             <a:r>
               <a:rPr lang="zh-CN" altLang="en-US" dirty="0" smtClean="0">
                 <a:latin typeface="Arial" panose="020B0604020202020204" pitchFamily="34" charset="0"/>
-                <a:cs typeface="Arial" panose="020B0604020202020204" pitchFamily="34" charset="0"/>
+                <a:cs typeface="Times New Roman" panose="02020603050405020304" charset="0"/>
                 <a:sym typeface="+mn-ea"/>
               </a:rPr>
-              <a:t>难点：从</a:t>
-            </a:r>
-            <a:r>
-              <a:rPr lang="en-US" altLang="zh-CN" dirty="0" smtClean="0">
-                <a:latin typeface="Arial" panose="020B0604020202020204" pitchFamily="34" charset="0"/>
-                <a:cs typeface="Arial" panose="020B0604020202020204" pitchFamily="34" charset="0"/>
-                <a:sym typeface="+mn-ea"/>
-              </a:rPr>
-              <a:t>"</a:t>
-            </a:r>
-            <a:r>
-              <a:rPr lang="zh-CN" altLang="en-US" dirty="0" smtClean="0">
-                <a:latin typeface="Arial" panose="020B0604020202020204" pitchFamily="34" charset="0"/>
-                <a:cs typeface="Arial" panose="020B0604020202020204" pitchFamily="34" charset="0"/>
-                <a:sym typeface="+mn-ea"/>
-              </a:rPr>
-              <a:t>大模型会生成文字</a:t>
-            </a:r>
-            <a:r>
-              <a:rPr lang="en-US" altLang="zh-CN" dirty="0" smtClean="0">
-                <a:latin typeface="Arial" panose="020B0604020202020204" pitchFamily="34" charset="0"/>
-                <a:cs typeface="Arial" panose="020B0604020202020204" pitchFamily="34" charset="0"/>
-                <a:sym typeface="+mn-ea"/>
-              </a:rPr>
-              <a:t>"</a:t>
-            </a:r>
-            <a:r>
-              <a:rPr lang="zh-CN" altLang="en-US" dirty="0" smtClean="0">
-                <a:latin typeface="Arial" panose="020B0604020202020204" pitchFamily="34" charset="0"/>
-                <a:cs typeface="Arial" panose="020B0604020202020204" pitchFamily="34" charset="0"/>
-                <a:sym typeface="+mn-ea"/>
-              </a:rPr>
-              <a:t>过渡到</a:t>
-            </a:r>
-            <a:r>
-              <a:rPr lang="en-US" altLang="zh-CN" dirty="0" smtClean="0">
-                <a:latin typeface="Arial" panose="020B0604020202020204" pitchFamily="34" charset="0"/>
-                <a:cs typeface="Arial" panose="020B0604020202020204" pitchFamily="34" charset="0"/>
-                <a:sym typeface="+mn-ea"/>
-              </a:rPr>
-              <a:t>"</a:t>
-            </a:r>
-            <a:r>
-              <a:rPr lang="zh-CN" altLang="en-US" dirty="0" smtClean="0">
-                <a:latin typeface="Arial" panose="020B0604020202020204" pitchFamily="34" charset="0"/>
-                <a:cs typeface="Arial" panose="020B0604020202020204" pitchFamily="34" charset="0"/>
-                <a:sym typeface="+mn-ea"/>
-              </a:rPr>
-              <a:t>提示词在塑造模型行为</a:t>
-            </a:r>
-            <a:r>
-              <a:rPr lang="en-US" altLang="zh-CN" dirty="0" smtClean="0">
-                <a:latin typeface="Arial" panose="020B0604020202020204" pitchFamily="34" charset="0"/>
-                <a:cs typeface="Arial" panose="020B0604020202020204" pitchFamily="34" charset="0"/>
-                <a:sym typeface="+mn-ea"/>
-              </a:rPr>
-              <a:t>"</a:t>
-            </a:r>
-            <a:r>
-              <a:rPr lang="zh-CN" altLang="en-US" dirty="0" smtClean="0">
-                <a:latin typeface="Arial" panose="020B0604020202020204" pitchFamily="34" charset="0"/>
-                <a:cs typeface="Arial" panose="020B0604020202020204" pitchFamily="34" charset="0"/>
-                <a:sym typeface="+mn-ea"/>
-              </a:rPr>
-              <a:t>这一系统化认知</a:t>
+              <a:t>难点：从文字生成过渡到提示词塑造模型行为的系统化认知</a:t>
             </a:r>
             <a:endParaRPr lang="zh-CN" altLang="en-US" dirty="0" smtClean="0">
               <a:latin typeface="Arial" panose="020B0604020202020204" pitchFamily="34" charset="0"/>
-              <a:cs typeface="Arial" panose="020B0604020202020204" pitchFamily="34" charset="0"/>
+              <a:cs typeface="Times New Roman" panose="02020603050405020304" charset="0"/>
               <a:sym typeface="+mn-ea"/>
             </a:endParaRPr>
           </a:p>

--- a/base_ppt/base_output/1.2_提示词工程.pptx
+++ b/base_ppt/base_output/1.2_提示词工程.pptx
@@ -16129,21 +16129,21 @@
                 <a:latin typeface="Arial" panose="020B0604020202020204" pitchFamily="34" charset="0"/>
                 <a:cs typeface="Arial" panose="020B0604020202020204" pitchFamily="34" charset="0"/>
               </a:rPr>
-              <a:t>提示词并不是模型交互中的附属品，而是</a:t>
+              <a:t>在本任务中，解决的是提示词工程的认知起点问题。完成任务后，学员应当意识到：提示词并不是模型交互中的附属品，而是</a:t>
             </a:r>
             <a:r>
               <a:rPr lang="en-US" altLang="zh-CN" dirty="0">
                 <a:latin typeface="Arial" panose="020B0604020202020204" pitchFamily="34" charset="0"/>
                 <a:cs typeface="Arial" panose="020B0604020202020204" pitchFamily="34" charset="0"/>
               </a:rPr>
-              <a:t>Agent</a:t>
+              <a:t> Agent </a:t>
             </a:r>
             <a:r>
               <a:rPr lang="zh-CN" altLang="en-US" dirty="0">
                 <a:latin typeface="Arial" panose="020B0604020202020204" pitchFamily="34" charset="0"/>
                 <a:cs typeface="Arial" panose="020B0604020202020204" pitchFamily="34" charset="0"/>
               </a:rPr>
-              <a:t>行为设计的核心入口。它决定了模型如何理解任务、如何分配注意力、如何组织推理、如何控制输出。提示词工程的目标不是把话说得更华丽，而是把要求说得更明确、更稳定、更高效。</a:t>
+              <a:t>行为设计的核心入口。它决定了模型如何理解任务、如何分配注意力、如何组织推理、如何控制输出。</a:t>
             </a:r>
             <a:endParaRPr lang="zh-CN" altLang="en-US" dirty="0">
               <a:latin typeface="Arial" panose="020B0604020202020204" pitchFamily="34" charset="0"/>
@@ -16726,7 +16726,7 @@
               <a:rPr lang="zh-CN" sz="2000" dirty="0">
                 <a:latin typeface="Arial" panose="020B0604020202020204" pitchFamily="34" charset="0"/>
               </a:rPr>
-              <a:t>提示词是智能体的行为说明书；</a:t>
+              <a:t>提示词是智能体行为设计的核心入口；</a:t>
             </a:r>
             <a:endParaRPr lang="zh-CN" sz="2000" dirty="0">
               <a:latin typeface="Arial" panose="020B0604020202020204" pitchFamily="34" charset="0"/>
@@ -16765,46 +16765,12 @@
             <a:r>
               <a:rPr lang="zh-CN" sz="2000" dirty="0">
                 <a:latin typeface="Arial" panose="020B0604020202020204" pitchFamily="34" charset="0"/>
-                <a:cs typeface="Arial" panose="020B0604020202020204" pitchFamily="34" charset="0"/>
                 <a:sym typeface="+mn-ea"/>
               </a:rPr>
-              <a:t>从</a:t>
+              <a:t>理解提示词如何塑造模型行为而非简单提问；</a:t>
             </a:r>
-            <a:r>
-              <a:rPr lang="en-US" altLang="zh-CN" sz="2000" dirty="0">
-                <a:latin typeface="Arial" panose="020B0604020202020204" pitchFamily="34" charset="0"/>
-                <a:cs typeface="Arial" panose="020B0604020202020204" pitchFamily="34" charset="0"/>
-                <a:sym typeface="+mn-ea"/>
-              </a:rPr>
-              <a:t>LLM</a:t>
-            </a:r>
-            <a:r>
-              <a:rPr lang="zh-CN" altLang="en-US" sz="2000" dirty="0">
-                <a:latin typeface="Arial" panose="020B0604020202020204" pitchFamily="34" charset="0"/>
-                <a:cs typeface="Arial" panose="020B0604020202020204" pitchFamily="34" charset="0"/>
-                <a:sym typeface="+mn-ea"/>
-              </a:rPr>
-              <a:t>到</a:t>
-            </a:r>
-            <a:r>
-              <a:rPr lang="en-US" altLang="zh-CN" sz="2000" dirty="0">
-                <a:latin typeface="Arial" panose="020B0604020202020204" pitchFamily="34" charset="0"/>
-                <a:cs typeface="Arial" panose="020B0604020202020204" pitchFamily="34" charset="0"/>
-                <a:sym typeface="+mn-ea"/>
-              </a:rPr>
-              <a:t>Agent</a:t>
-            </a:r>
-            <a:r>
-              <a:rPr lang="zh-CN" altLang="en-US" sz="2000" dirty="0">
-                <a:latin typeface="Arial" panose="020B0604020202020204" pitchFamily="34" charset="0"/>
-                <a:cs typeface="Arial" panose="020B0604020202020204" pitchFamily="34" charset="0"/>
-                <a:sym typeface="+mn-ea"/>
-              </a:rPr>
-              <a:t>的决策逻辑认知；</a:t>
-            </a:r>
-            <a:endParaRPr lang="zh-CN" altLang="en-US" sz="2000" dirty="0">
+            <a:endParaRPr lang="zh-CN" sz="2000" dirty="0">
               <a:latin typeface="Arial" panose="020B0604020202020204" pitchFamily="34" charset="0"/>
-              <a:cs typeface="Arial" panose="020B0604020202020204" pitchFamily="34" charset="0"/>
               <a:sym typeface="+mn-ea"/>
             </a:endParaRPr>
           </a:p>
@@ -16842,7 +16808,7 @@
               <a:rPr lang="zh-CN" sz="2000" dirty="0">
                 <a:latin typeface="Arial" panose="020B0604020202020204" pitchFamily="34" charset="0"/>
               </a:rPr>
-              <a:t>优质提示词兼顾确定性、逻辑性、效率；</a:t>
+              <a:t>优质提示词兼顾确定性、逻辑性和效率；</a:t>
             </a:r>
             <a:endParaRPr lang="zh-CN" sz="2000" dirty="0">
               <a:latin typeface="Arial" panose="020B0604020202020204" pitchFamily="34" charset="0"/>
@@ -16882,7 +16848,7 @@
               <a:rPr lang="zh-CN" sz="2000" dirty="0">
                 <a:latin typeface="Arial" panose="020B0604020202020204" pitchFamily="34" charset="0"/>
               </a:rPr>
-              <a:t>结构化提示词与版本管理确保可维护性。</a:t>
+              <a:t>结构化提示词和版本管理保障可维护性；</a:t>
             </a:r>
             <a:endParaRPr lang="zh-CN" sz="2000" dirty="0">
               <a:latin typeface="Arial" panose="020B0604020202020204" pitchFamily="34" charset="0"/>
@@ -16923,7 +16889,7 @@
                 <a:latin typeface="Arial" panose="020B0604020202020204" pitchFamily="34" charset="0"/>
                 <a:sym typeface="+mn-ea"/>
               </a:rPr>
-              <a:t>提示词如何塑造模型行为而非简单提问；</a:t>
+              <a:t>概率机制理解提示词约束原理</a:t>
             </a:r>
             <a:endParaRPr lang="zh-CN" sz="2000" dirty="0">
               <a:latin typeface="Arial" panose="020B0604020202020204" pitchFamily="34" charset="0"/>
@@ -16965,7 +16931,7 @@
                 <a:latin typeface="Arial" panose="020B0604020202020204" pitchFamily="34" charset="0"/>
                 <a:sym typeface="+mn-ea"/>
               </a:rPr>
-              <a:t>从概率生成到可控输出的系统化设计。</a:t>
+              <a:t>提示词优化从玄学到科学迭代</a:t>
             </a:r>
             <a:endParaRPr lang="zh-CN" sz="2000" dirty="0">
               <a:latin typeface="Arial" panose="020B0604020202020204" pitchFamily="34" charset="0"/>
@@ -18754,7 +18720,26 @@
                 <a:cs typeface="微软雅黑" panose="020B0503020204020204" pitchFamily="34" charset="-122"/>
                 <a:sym typeface="+mn-ea"/>
               </a:rPr>
-              <a:t>提示，判断一下对回复结果有无影响，并总结原因。如果要为一个企业客服</a:t>
+              <a:t>提示，判断一下对回复结果有无影响，并总结原因。</a:t>
+            </a:r>
+            <a:r>
+              <a:rPr lang="en-US" altLang="zh-CN" sz="2000" dirty="0">
+                <a:latin typeface="微软雅黑" panose="020B0503020204020204" pitchFamily="34" charset="-122"/>
+                <a:ea typeface="微软雅黑" panose="020B0503020204020204" pitchFamily="34" charset="-122"/>
+                <a:cs typeface="微软雅黑" panose="020B0503020204020204" pitchFamily="34" charset="-122"/>
+                <a:sym typeface="+mn-ea"/>
+              </a:rPr>
+              <a:t>
+</a:t>
+            </a:r>
+            <a:r>
+              <a:rPr lang="zh-CN" altLang="en-US" sz="2000" dirty="0">
+                <a:latin typeface="微软雅黑" panose="020B0503020204020204" pitchFamily="34" charset="-122"/>
+                <a:ea typeface="微软雅黑" panose="020B0503020204020204" pitchFamily="34" charset="-122"/>
+                <a:cs typeface="微软雅黑" panose="020B0503020204020204" pitchFamily="34" charset="-122"/>
+                <a:sym typeface="+mn-ea"/>
+              </a:rPr>
+              <a:t>如果要为一个企业客服</a:t>
             </a:r>
             <a:r>
               <a:rPr lang="en-US" altLang="zh-CN" sz="2000" dirty="0">
@@ -18862,7 +18847,7 @@
         </p:nvSpPr>
         <p:spPr>
           <a:xfrm>
-            <a:off x="3348000" y="3924935"/>
+            <a:off x="3201950" y="3924935"/>
             <a:ext cx="5789295" cy="2376170"/>
           </a:xfrm>
           <a:prstGeom prst="rect">
@@ -18887,7 +18872,7 @@
                 <a:cs typeface="微软雅黑" panose="020B0503020204020204" pitchFamily="34" charset="-122"/>
                 <a:sym typeface="+mn-ea"/>
               </a:rPr>
-              <a:t>通过添加示例让模型模仿输出格式，提升一致性；最不能缺少的三项约束：明确角色与业务范围、定义处理流程步骤、设置拒答与输出格式规则。</a:t>
+              <a:t>通过添加示例让模型模仿输出格式，提升稳定性；系统提示词需明确角色、流程规则和输出格式三项核心约束，确保行为可控。</a:t>
             </a:r>
             <a:endParaRPr lang="zh-CN" sz="2000" dirty="0">
               <a:latin typeface="微软雅黑" panose="020B0503020204020204" pitchFamily="34" charset="-122"/>
@@ -20069,13 +20054,33 @@
               <a:rPr lang="zh-CN" altLang="zh-CN" dirty="0">
                 <a:latin typeface="微软雅黑" panose="020B0503020204020204" pitchFamily="34" charset="-122"/>
                 <a:ea typeface="微软雅黑" panose="020B0503020204020204" pitchFamily="34" charset="-122"/>
+                <a:cs typeface="微软雅黑" panose="020B0503020204020204" pitchFamily="34" charset="-122"/>
                 <a:sym typeface="+mn-ea"/>
               </a:rPr>
-              <a:t>某物流分拣中心每天处理上万件包裹，现有系统按固定流程操作。经理想引入新系统，让系统自己判断处理条码污损、易碎品等异常情况，并能根据实时车流调整分拣优先级。</a:t>
+              <a:t>某物流分拣中心每天处理上万件包裹，从卸货到装车需经过扫码、称重、分拣、复核等固定步骤，操作员只需照屏幕提示执行，这套流程已稳定运行三年。然而，经理希望引入新系统：让系统自主判断</a:t>
             </a:r>
-            <a:endParaRPr lang="zh-CN" altLang="zh-CN" dirty="0">
+            <a:r>
+              <a:rPr lang="en-US" altLang="zh-CN" dirty="0">
+                <a:latin typeface="微软雅黑" panose="020B0503020204020204" pitchFamily="34" charset="-122"/>
+                <a:ea typeface="微软雅黑" panose="020B0503020204020204" pitchFamily="34" charset="-122"/>
+                <a:cs typeface="微软雅黑" panose="020B0503020204020204" pitchFamily="34" charset="-122"/>
+                <a:sym typeface="+mn-ea"/>
+              </a:rPr>
+              <a:t>——</a:t>
+            </a:r>
+            <a:r>
+              <a:rPr lang="zh-CN" altLang="en-US" dirty="0">
+                <a:latin typeface="微软雅黑" panose="020B0503020204020204" pitchFamily="34" charset="-122"/>
+                <a:ea typeface="微软雅黑" panose="020B0503020204020204" pitchFamily="34" charset="-122"/>
+                <a:cs typeface="微软雅黑" panose="020B0503020204020204" pitchFamily="34" charset="-122"/>
+                <a:sym typeface="+mn-ea"/>
+              </a:rPr>
+              <a:t>遇到条码污损包裹，先清洁再扫码；发现疑似易碎品，自动改走缓降滑道；还能根据实时车流调整分拣优先级。这引发了与传统自动化流程的本质差异思考：新系统需要具备哪些功能才能在企业场景中稳定工作？如何用指令让系统理解并执行经理的设想？</a:t>
+            </a:r>
+            <a:endParaRPr lang="zh-CN" altLang="en-US" dirty="0">
               <a:latin typeface="微软雅黑" panose="020B0503020204020204" pitchFamily="34" charset="-122"/>
               <a:ea typeface="微软雅黑" panose="020B0503020204020204" pitchFamily="34" charset="-122"/>
+              <a:cs typeface="微软雅黑" panose="020B0503020204020204" pitchFamily="34" charset="-122"/>
               <a:sym typeface="+mn-ea"/>
             </a:endParaRPr>
           </a:p>
@@ -20142,7 +20147,7 @@
                 <a:ea typeface="微软雅黑" panose="020B0503020204020204" pitchFamily="34" charset="-122"/>
                 <a:cs typeface="微软雅黑" panose="020B0503020204020204" pitchFamily="34" charset="-122"/>
               </a:rPr>
-              <a:t>同样是自动化，工作流和智能体有什么区别？</a:t>
+              <a:t>新系统与传统工作流的核心区别是什么？</a:t>
             </a:r>
             <a:r>
               <a:rPr lang="en-US" altLang="zh-CN" sz="2000" dirty="0">
@@ -20159,7 +20164,7 @@
                 <a:ea typeface="微软雅黑" panose="020B0503020204020204" pitchFamily="34" charset="-122"/>
                 <a:cs typeface="微软雅黑" panose="020B0503020204020204" pitchFamily="34" charset="-122"/>
               </a:rPr>
-              <a:t>新系统需要具备什么功能才能在企业中稳定工作？</a:t>
+              <a:t>新系统需要具备哪些功能才能稳定工作？</a:t>
             </a:r>
             <a:r>
               <a:rPr lang="en-US" altLang="zh-CN" sz="2000" dirty="0">
@@ -20176,7 +20181,7 @@
                 <a:ea typeface="微软雅黑" panose="020B0503020204020204" pitchFamily="34" charset="-122"/>
                 <a:cs typeface="微软雅黑" panose="020B0503020204020204" pitchFamily="34" charset="-122"/>
               </a:rPr>
-              <a:t>如何用自己的话对系统下指令来实现经理的想法？</a:t>
+              <a:t>如何用你的话对系统下指令来实现经理的想法？</a:t>
             </a:r>
             <a:endParaRPr lang="zh-CN" altLang="en-US" sz="2000" dirty="0">
               <a:latin typeface="微软雅黑" panose="020B0503020204020204" pitchFamily="34" charset="-122"/>
@@ -22643,41 +22648,9 @@
                 <a:ea typeface="微软雅黑" panose="020B0503020204020204" pitchFamily="34" charset="-122"/>
                 <a:cs typeface="微软雅黑" panose="020B0503020204020204" pitchFamily="34" charset="-122"/>
               </a:rPr>
-              <a:t>本章旨在帮助学员建立提示词工程的基础认知，理解提示词在智能体系统中的核心作用，掌握提示词工程的基本目标、基本原理和基本工作环境。通过本章学习，学员将认识到：提示词并不是对模型</a:t>
+              <a:t>本章旨在帮助学员建立提示词工程的基础认知，理解提示词在智能体系统中的核心作用，掌握提示词工程的基本目标、基本原理和基本工作环境。</a:t>
             </a:r>
-            <a:r>
-              <a:rPr lang="en-US" altLang="zh-CN" dirty="0" smtClean="0">
-                <a:latin typeface="微软雅黑" panose="020B0503020204020204" pitchFamily="34" charset="-122"/>
-                <a:ea typeface="微软雅黑" panose="020B0503020204020204" pitchFamily="34" charset="-122"/>
-                <a:cs typeface="微软雅黑" panose="020B0503020204020204" pitchFamily="34" charset="-122"/>
-              </a:rPr>
-              <a:t>“</a:t>
-            </a:r>
-            <a:r>
-              <a:rPr lang="zh-CN" altLang="en-US" dirty="0" smtClean="0">
-                <a:latin typeface="微软雅黑" panose="020B0503020204020204" pitchFamily="34" charset="-122"/>
-                <a:ea typeface="微软雅黑" panose="020B0503020204020204" pitchFamily="34" charset="-122"/>
-                <a:cs typeface="微软雅黑" panose="020B0503020204020204" pitchFamily="34" charset="-122"/>
-              </a:rPr>
-              <a:t>随口一说</a:t>
-            </a:r>
-            <a:r>
-              <a:rPr lang="en-US" altLang="zh-CN" dirty="0" smtClean="0">
-                <a:latin typeface="微软雅黑" panose="020B0503020204020204" pitchFamily="34" charset="-122"/>
-                <a:ea typeface="微软雅黑" panose="020B0503020204020204" pitchFamily="34" charset="-122"/>
-                <a:cs typeface="微软雅黑" panose="020B0503020204020204" pitchFamily="34" charset="-122"/>
-              </a:rPr>
-              <a:t>”</a:t>
-            </a:r>
-            <a:r>
-              <a:rPr lang="zh-CN" altLang="en-US" dirty="0" smtClean="0">
-                <a:latin typeface="微软雅黑" panose="020B0503020204020204" pitchFamily="34" charset="-122"/>
-                <a:ea typeface="微软雅黑" panose="020B0503020204020204" pitchFamily="34" charset="-122"/>
-                <a:cs typeface="微软雅黑" panose="020B0503020204020204" pitchFamily="34" charset="-122"/>
-              </a:rPr>
-              <a:t>，而是对智能体行为边界、推理路径和输出形式的显式设计。</a:t>
-            </a:r>
-            <a:endParaRPr lang="zh-CN" altLang="en-US" dirty="0" smtClean="0">
+            <a:endParaRPr lang="zh-CN" dirty="0" smtClean="0">
               <a:latin typeface="微软雅黑" panose="020B0503020204020204" pitchFamily="34" charset="-122"/>
               <a:ea typeface="微软雅黑" panose="020B0503020204020204" pitchFamily="34" charset="-122"/>
               <a:cs typeface="微软雅黑" panose="020B0503020204020204" pitchFamily="34" charset="-122"/>
@@ -22988,7 +22961,7 @@
                 <a:cs typeface="微软雅黑" panose="020B0503020204020204" pitchFamily="34" charset="-122"/>
                 <a:sym typeface="+mn-ea"/>
               </a:rPr>
-              <a:t>理解提示词的价值，建立行为设计意识</a:t>
+              <a:t>理解提示词在智能体系统中的核心作用；</a:t>
             </a:r>
             <a:endParaRPr lang="zh-CN" dirty="0">
               <a:latin typeface="微软雅黑" panose="020B0503020204020204" pitchFamily="34" charset="-122"/>
@@ -23034,7 +23007,7 @@
                 <a:cs typeface="微软雅黑" panose="020B0503020204020204" pitchFamily="34" charset="-122"/>
                 <a:sym typeface="+mn-ea"/>
               </a:rPr>
-              <a:t>能围绕确定性、逻辑性、效率三个维度分析一个提示词是否优质；</a:t>
+              <a:t>掌握提示词工程的基本目标、基本原理和基本工作环境；</a:t>
             </a:r>
             <a:endParaRPr lang="zh-CN" dirty="0">
               <a:latin typeface="微软雅黑" panose="020B0503020204020204" pitchFamily="34" charset="-122"/>
@@ -23080,27 +23053,9 @@
                 <a:cs typeface="微软雅黑" panose="020B0503020204020204" pitchFamily="34" charset="-122"/>
                 <a:sym typeface="+mn-ea"/>
               </a:rPr>
-              <a:t>能使用</a:t>
+              <a:t>认识到提示词是对智能体行为的显式设计</a:t>
             </a:r>
-            <a:r>
-              <a:rPr lang="en-US" altLang="zh-CN" dirty="0">
-                <a:latin typeface="微软雅黑" panose="020B0503020204020204" pitchFamily="34" charset="-122"/>
-                <a:ea typeface="微软雅黑" panose="020B0503020204020204" pitchFamily="34" charset="-122"/>
-                <a:cs typeface="微软雅黑" panose="020B0503020204020204" pitchFamily="34" charset="-122"/>
-                <a:sym typeface="+mn-ea"/>
-              </a:rPr>
-              <a:t>RAGFlow</a:t>
-            </a:r>
-            <a:r>
-              <a:rPr lang="zh-CN" altLang="en-US" dirty="0">
-                <a:latin typeface="微软雅黑" panose="020B0503020204020204" pitchFamily="34" charset="-122"/>
-                <a:ea typeface="微软雅黑" panose="020B0503020204020204" pitchFamily="34" charset="-122"/>
-                <a:cs typeface="微软雅黑" panose="020B0503020204020204" pitchFamily="34" charset="-122"/>
-                <a:sym typeface="+mn-ea"/>
-              </a:rPr>
-              <a:t>工作流开展提示词测试、记录和迭代优化；</a:t>
-            </a:r>
-            <a:endParaRPr lang="zh-CN" altLang="en-US" dirty="0">
+            <a:endParaRPr lang="zh-CN" dirty="0">
               <a:latin typeface="微软雅黑" panose="020B0503020204020204" pitchFamily="34" charset="-122"/>
               <a:ea typeface="微软雅黑" panose="020B0503020204020204" pitchFamily="34" charset="-122"/>
               <a:cs typeface="微软雅黑" panose="020B0503020204020204" pitchFamily="34" charset="-122"/>
@@ -23144,7 +23099,53 @@
                 <a:cs typeface="微软雅黑" panose="020B0503020204020204" pitchFamily="34" charset="-122"/>
                 <a:sym typeface="+mn-ea"/>
               </a:rPr>
-              <a:t>能根据场景构建提示词，约束智能体输出</a:t>
+              <a:t>能从系统设计视角理解提示词即行为设计</a:t>
+            </a:r>
+            <a:endParaRPr lang="zh-CN" dirty="0">
+              <a:latin typeface="微软雅黑" panose="020B0503020204020204" pitchFamily="34" charset="-122"/>
+              <a:ea typeface="微软雅黑" panose="020B0503020204020204" pitchFamily="34" charset="-122"/>
+              <a:cs typeface="微软雅黑" panose="020B0503020204020204" pitchFamily="34" charset="-122"/>
+              <a:sym typeface="+mn-ea"/>
+            </a:endParaRPr>
+          </a:p>
+        </p:txBody>
+      </p:sp>
+      <p:sp>
+        <p:nvSpPr>
+          <p:cNvPr id="17" name="文本框 16"/>
+          <p:cNvSpPr txBox="1"/>
+          <p:nvPr/>
+        </p:nvSpPr>
+        <p:spPr>
+          <a:xfrm>
+            <a:off x="3006000" y="5439600"/>
+            <a:ext cx="8279765" cy="468630"/>
+          </a:xfrm>
+          <a:prstGeom prst="rect">
+            <a:avLst/>
+          </a:prstGeom>
+          <a:noFill/>
+        </p:spPr>
+        <p:txBody>
+          <a:bodyPr wrap="square" rtlCol="0">
+            <a:noAutofit/>
+          </a:bodyPr>
+          <a:p>
+            <a:pPr marL="800100" lvl="1" indent="-342900" algn="l" fontAlgn="auto">
+              <a:lnSpc>
+                <a:spcPct val="150000"/>
+              </a:lnSpc>
+              <a:buFont typeface="Wingdings" panose="05000000000000000000" pitchFamily="2" charset="2"/>
+              <a:buChar char="l"/>
+            </a:pPr>
+            <a:r>
+              <a:rPr lang="zh-CN" dirty="0">
+                <a:latin typeface="微软雅黑" panose="020B0503020204020204" pitchFamily="34" charset="-122"/>
+                <a:ea typeface="微软雅黑" panose="020B0503020204020204" pitchFamily="34" charset="-122"/>
+                <a:cs typeface="微软雅黑" panose="020B0503020204020204" pitchFamily="34" charset="-122"/>
+                <a:sym typeface="+mn-ea"/>
+              </a:rPr>
+              <a:t>能围绕确定性、逻辑性、效率三个维度分析一个提示词是否优质；</a:t>
             </a:r>
             <a:endParaRPr lang="zh-CN" dirty="0">
               <a:latin typeface="微软雅黑" panose="020B0503020204020204" pitchFamily="34" charset="-122"/>
@@ -26858,7 +26859,7 @@
                 <a:cs typeface="Times New Roman" panose="02020603050405020304" charset="0"/>
                 <a:sym typeface="+mn-ea"/>
               </a:rPr>
-              <a:t>从系统设计视角理解提示词价值，建立行为设计意识</a:t>
+              <a:t>从智能体系统设计视角理解提示词即行为设计</a:t>
             </a:r>
             <a:endParaRPr lang="zh-CN" dirty="0" smtClean="0">
               <a:latin typeface="Arial" panose="020B0604020202020204" pitchFamily="34" charset="0"/>
@@ -26962,7 +26963,7 @@
                 <a:cs typeface="Times New Roman" panose="02020603050405020304" charset="0"/>
                 <a:sym typeface="+mn-ea"/>
               </a:rPr>
-              <a:t>能根据场景构建提示词，约束智能体输出符合需求的内容</a:t>
+              <a:t>能判断如何构建提示词，约束智能体输出符合场景需求</a:t>
             </a:r>
             <a:endParaRPr lang="zh-CN" dirty="0" smtClean="0">
               <a:latin typeface="Arial" panose="020B0604020202020204" pitchFamily="34" charset="0"/>
